--- a/slides/agents_overview.pptx
+++ b/slides/agents_overview.pptx
@@ -551,7 +551,7 @@
                 <a:ea typeface="Microsoft YaHei"/>
                 <a:cs typeface="Microsoft YaHei"/>
               </a:rPr>
-              <a:t>左边 xpugen 工作在算子层，给国产 GPU 写内核，产出的是 M100 原生的 .xpu，不是 CUDA。右边 m100-model-agent 工作在模型层，在 SGLang 上完成模型适配，再提升实测性能。</a:t>
+              <a:t>左边 m100-model-agent 工作在模型层，在 SGLang 上完成模型适配，再提升实测性能。右边 xpugen 工作在算子层，给国产 GPU 写内核，产出的是 M100 原生的 .xpu，不是 CUDA。</a:t>
             </a:r>
           </a:p>
           <a:p>
@@ -569,7 +569,7 @@
                 <a:ea typeface="Microsoft YaHei"/>
                 <a:cs typeface="Microsoft YaHei"/>
               </a:rPr>
-              <a:t>两者的结构是一样的，每一列中间的三个方块就是各自的判定链：模型只负责提出方案，是否合格由固定规则与真机实测决定，不由模型自己解释。两边还各有一个不作判据的诊断步骤——xpugen 用模拟器定位瓶颈，model-agent 用独立进程采集 trace，它们的数据都不计入收益。</a:t>
+              <a:t>两者的结构是一样的，每一列中间的三个方块就是各自的判定链，写的都是通过条件：模型只负责提出方案，是否合格由固定规则与真机实测决定，不由模型自己解释。两边还各有一个不作判据的诊断步骤——model-agent 用独立进程采集 trace，xpugen 用模拟器定位瓶颈，它们的数据都不计入收益。</a:t>
             </a:r>
           </a:p>
           <a:p>
@@ -587,7 +587,7 @@
                 <a:ea typeface="Microsoft YaHei"/>
                 <a:cs typeface="Microsoft YaHei"/>
               </a:rPr>
-              <a:t>真正的区别是加了底色的那一行，测量范围。xpugen 测的是单算子，在 bench harness 上对照 CPU 参考；model-agent 测的是整模型，真实服务、全量评测。</a:t>
+              <a:t>真正的区别是加了底色的那一行，测量范围。model-agent 测的是整模型，真实服务、全量评测；xpugen 测的是单算子，在 bench harness 上对照 CPU 参考。</a:t>
             </a:r>
           </a:p>
           <a:p>
@@ -605,7 +605,7 @@
                 <a:ea typeface="Microsoft YaHei"/>
                 <a:cs typeface="Microsoft YaHei"/>
               </a:rPr>
-              <a:t>中间两条箭头是协作关系。向左这条：model-agent 在 B 阶段定位到的瓶颈算子，转为 xpugen 的内核需求。向右这条：xpugen 验证通过的内核，作为候选补丁进入 model-agent 的 C 阶段。</a:t>
+              <a:t>中间两条箭头是协作关系。向右这条：model-agent 在 B 阶段定位到的瓶颈算子，转为 xpugen 的内核需求。向左这条：xpugen 验证通过的内核，回到 model-agent 的 C 阶段，作为候选补丁重新判定。</a:t>
             </a:r>
           </a:p>
           <a:p>
@@ -623,7 +623,7 @@
                 <a:ea typeface="Microsoft YaHei"/>
                 <a:cs typeface="Microsoft YaHei"/>
               </a:rPr>
-              <a:t>这里有一个容易被忽略的点，也就是最下面这句话：单算子提速不等于整模型提速。bench 只证明这个算子本身更快，它可能并不在关键路径上，也可能带来额外的访存开销。所以同一个内核要在两层各判定一次，只有通过模型层性能门的部分才计入交付。</a:t>
+              <a:t>这里有一个容易被忽略的点，也就是最下面这句话：单算子提速不等于整模型提速。bench 只证明这个算子本身更快，它可能并不在关键路径上，也可能带来额外的访存开销。所以同一个内核要在两层各判定一次，只有在模型层也确实更快的部分才计入交付。</a:t>
             </a:r>
           </a:p>
           <a:p>
@@ -3743,7 +3743,7 @@
                 <a:ea typeface="Microsoft YaHei"/>
                 <a:cs typeface="Microsoft YaHei"/>
               </a:rPr>
-              <a:t>AGENT 纵览 · 算子层与模型层</a:t>
+              <a:t>AGENT 纵览 · 模型层与算子层</a:t>
             </a:r>
           </a:p>
         </p:txBody>
@@ -3790,7 +3790,7 @@
                 <a:ea typeface="Microsoft YaHei"/>
                 <a:cs typeface="Microsoft YaHei"/>
               </a:rPr>
-              <a:t>两个 Agent：xpugen 写算子，m100-model-agent 调模型</a:t>
+              <a:t>两个 Agent：m100-model-agent 调模型，xpugen 写算子</a:t>
             </a:r>
           </a:p>
         </p:txBody>
@@ -3942,7 +3942,7 @@
                 <a:ea typeface="Microsoft YaHei"/>
                 <a:cs typeface="Microsoft YaHei"/>
               </a:rPr>
-              <a:t>xpugen</a:t>
+              <a:t>m100-model-agent</a:t>
             </a:r>
             <a:r>
               <a:rPr sz="1200" b="0">
@@ -3953,7 +3953,7 @@
                 <a:ea typeface="Microsoft YaHei"/>
                 <a:cs typeface="Microsoft YaHei"/>
               </a:rPr>
-              <a:t>　算子层</a:t>
+              <a:t>　模型层</a:t>
             </a:r>
           </a:p>
         </p:txBody>
@@ -4000,7 +4000,7 @@
                 <a:ea typeface="Microsoft YaHei"/>
                 <a:cs typeface="Microsoft YaHei"/>
               </a:rPr>
-              <a:t>给国产 GPU 写算子，产出 M100 原生内核（.xpu）</a:t>
+              <a:t>在 SGLang 上完成模型适配，并提升实测性能</a:t>
             </a:r>
           </a:p>
         </p:txBody>
@@ -4124,7 +4124,7 @@
                 <a:ea typeface="Microsoft YaHei"/>
                 <a:cs typeface="Microsoft YaHei"/>
               </a:rPr>
-              <a:t>L0 编译运行</a:t>
+              <a:t>① 输出未变</a:t>
             </a:r>
           </a:p>
         </p:txBody>
@@ -4180,7 +4180,7 @@
                 <a:ea typeface="Microsoft YaHei"/>
                 <a:cs typeface="Microsoft YaHei"/>
               </a:rPr>
-              <a:t>L1 数值正确</a:t>
+              <a:t>② 质量未降</a:t>
             </a:r>
           </a:p>
         </p:txBody>
@@ -4258,7 +4258,7 @@
                 <a:ea typeface="Microsoft YaHei"/>
                 <a:cs typeface="Microsoft YaHei"/>
               </a:rPr>
-              <a:t>bench 真机提速</a:t>
+              <a:t>③ 确实更快</a:t>
             </a:r>
           </a:p>
         </p:txBody>
@@ -4327,7 +4327,7 @@
                 <a:ea typeface="Microsoft YaHei"/>
                 <a:cs typeface="Microsoft YaHei"/>
               </a:rPr>
-              <a:t>profile 用模拟器定位瓶颈，不作判据</a:t>
+              <a:t>profiling 独立进程采 trace，不计入收益</a:t>
             </a:r>
           </a:p>
         </p:txBody>
@@ -4450,7 +4450,7 @@
                 <a:ea typeface="Microsoft YaHei"/>
                 <a:cs typeface="Microsoft YaHei"/>
               </a:rPr>
-              <a:t>单算子，bench harness，对照 CPU 参考实现</a:t>
+              <a:t>整模型，真实服务，120 题全量评测</a:t>
             </a:r>
           </a:p>
         </p:txBody>
@@ -4575,7 +4575,7 @@
                 <a:ea typeface="Microsoft YaHei"/>
                 <a:cs typeface="Microsoft YaHei"/>
               </a:rPr>
-              <a:t>精度默认 8 轮；性能 50 轮无进展才判停滞</a:t>
+              <a:t>最多 6 轮候选，总预算 36000 秒</a:t>
             </a:r>
           </a:p>
         </p:txBody>
@@ -4680,7 +4680,7 @@
                 <a:ea typeface="Microsoft YaHei"/>
                 <a:cs typeface="Microsoft YaHei"/>
               </a:rPr>
-              <a:t>m100-model-agent</a:t>
+              <a:t>xpugen</a:t>
             </a:r>
             <a:r>
               <a:rPr sz="1200" b="0">
@@ -4691,7 +4691,7 @@
                 <a:ea typeface="Microsoft YaHei"/>
                 <a:cs typeface="Microsoft YaHei"/>
               </a:rPr>
-              <a:t>　模型层</a:t>
+              <a:t>　算子层</a:t>
             </a:r>
           </a:p>
         </p:txBody>
@@ -4738,7 +4738,7 @@
                 <a:ea typeface="Microsoft YaHei"/>
                 <a:cs typeface="Microsoft YaHei"/>
               </a:rPr>
-              <a:t>在 SGLang 上完成模型适配，并提升实测性能</a:t>
+              <a:t>给国产 GPU 写算子，产出 M100 原生内核（.xpu）</a:t>
             </a:r>
           </a:p>
         </p:txBody>
@@ -4862,7 +4862,7 @@
                 <a:ea typeface="Microsoft YaHei"/>
                 <a:cs typeface="Microsoft YaHei"/>
               </a:rPr>
-              <a:t>① 数值门</a:t>
+              <a:t>L0 能编译运行</a:t>
             </a:r>
           </a:p>
         </p:txBody>
@@ -4918,7 +4918,7 @@
                 <a:ea typeface="Microsoft YaHei"/>
                 <a:cs typeface="Microsoft YaHei"/>
               </a:rPr>
-              <a:t>② 质量门</a:t>
+              <a:t>L1 数值正确</a:t>
             </a:r>
           </a:p>
         </p:txBody>
@@ -4996,7 +4996,7 @@
                 <a:ea typeface="Microsoft YaHei"/>
                 <a:cs typeface="Microsoft YaHei"/>
               </a:rPr>
-              <a:t>③ 性能门</a:t>
+              <a:t>bench 真机更快</a:t>
             </a:r>
           </a:p>
         </p:txBody>
@@ -5065,7 +5065,7 @@
                 <a:ea typeface="Microsoft YaHei"/>
                 <a:cs typeface="Microsoft YaHei"/>
               </a:rPr>
-              <a:t>profiling 独立进程采 trace，不计入收益</a:t>
+              <a:t>profile 用模拟器定位瓶颈，不作判据</a:t>
             </a:r>
           </a:p>
         </p:txBody>
@@ -5188,7 +5188,7 @@
                 <a:ea typeface="Microsoft YaHei"/>
                 <a:cs typeface="Microsoft YaHei"/>
               </a:rPr>
-              <a:t>整模型，真实服务，120 题全量评测</a:t>
+              <a:t>单算子，bench harness，对照 CPU 参考实现</a:t>
             </a:r>
           </a:p>
         </p:txBody>
@@ -5313,7 +5313,7 @@
                 <a:ea typeface="Microsoft YaHei"/>
                 <a:cs typeface="Microsoft YaHei"/>
               </a:rPr>
-              <a:t>最多 6 轮候选，总预算 36000 秒</a:t>
+              <a:t>精度默认 8 轮；性能 50 轮无进展才判停滞</a:t>
             </a:r>
           </a:p>
         </p:txBody>
@@ -5372,7 +5372,7 @@
           <p:nvPr/>
         </p:nvCxnSpPr>
         <p:spPr>
-          <a:xfrm flipH="1">
+          <a:xfrm>
             <a:off x="4901183" y="2788920"/>
             <a:ext cx="2389328" cy="0"/>
           </a:xfrm>
@@ -5488,7 +5488,7 @@
           <p:nvPr/>
         </p:nvCxnSpPr>
         <p:spPr>
-          <a:xfrm>
+          <a:xfrm flipH="1">
             <a:off x="4901183" y="4197096"/>
             <a:ext cx="2389328" cy="0"/>
           </a:xfrm>
@@ -5545,7 +5545,7 @@
                 <a:ea typeface="Microsoft YaHei"/>
                 <a:cs typeface="Microsoft YaHei"/>
               </a:rPr>
-              <a:t>进入 C 阶段，重新判定一次</a:t>
+              <a:t>回到 C 阶段，重新判定一次</a:t>
             </a:r>
           </a:p>
         </p:txBody>
@@ -5708,7 +5708,7 @@
                 <a:ea typeface="Microsoft YaHei"/>
                 <a:cs typeface="Microsoft YaHei"/>
               </a:rPr>
-              <a:t>xpugen 的 bench 证明算子本身更快，m100-model-agent 的性能门证明整模型更快；只有后者计入交付</a:t>
+              <a:t>xpugen 的 bench 只证明算子本身更快；能否计入交付，取决于 m100-model-agent 的第三道判定</a:t>
             </a:r>
           </a:p>
         </p:txBody>
